--- a/data/qa_dataset/results/figures.pptx
+++ b/data/qa_dataset/results/figures.pptx
@@ -6,6 +6,7 @@
   </p:sldMasterIdLst>
   <p:sldIdLst>
     <p:sldId id="256" r:id="rId2"/>
+    <p:sldId id="257" r:id="rId3"/>
   </p:sldIdLst>
   <p:sldSz cx="12192000" cy="6858000"/>
   <p:notesSz cx="6858000" cy="9144000"/>
@@ -3323,10 +3324,10 @@
       </p:grpSpPr>
       <p:pic>
         <p:nvPicPr>
-          <p:cNvPr id="33" name="Picture 32">
-            <a:extLst>
-              <a:ext uri="{FF2B5EF4-FFF2-40B4-BE49-F238E27FC236}">
-                <a16:creationId xmlns:a16="http://schemas.microsoft.com/office/drawing/2014/main" id="{2F0D8CB5-B708-449D-A702-EEBF28AAE94F}"/>
+          <p:cNvPr id="41" name="Picture 40">
+            <a:extLst>
+              <a:ext uri="{FF2B5EF4-FFF2-40B4-BE49-F238E27FC236}">
+                <a16:creationId xmlns:a16="http://schemas.microsoft.com/office/drawing/2014/main" id="{0E9C8659-ED4A-71FF-1EA0-5BE5D2F400E6}"/>
               </a:ext>
             </a:extLst>
           </p:cNvPr>
@@ -3343,15 +3344,15 @@
               </a:ext>
             </a:extLst>
           </a:blip>
-          <a:srcRect t="11554" r="8985"/>
+          <a:srcRect t="11918" r="9190"/>
           <a:stretch>
             <a:fillRect/>
           </a:stretch>
         </p:blipFill>
         <p:spPr>
           <a:xfrm>
-            <a:off x="-18025" y="2644486"/>
-            <a:ext cx="3569110" cy="2601269"/>
+            <a:off x="3439650" y="2502275"/>
+            <a:ext cx="3439650" cy="2502275"/>
           </a:xfrm>
           <a:prstGeom prst="rect">
             <a:avLst/>
@@ -3360,10 +3361,10 @@
       </p:pic>
       <p:pic>
         <p:nvPicPr>
-          <p:cNvPr id="35" name="Picture 34">
-            <a:extLst>
-              <a:ext uri="{FF2B5EF4-FFF2-40B4-BE49-F238E27FC236}">
-                <a16:creationId xmlns:a16="http://schemas.microsoft.com/office/drawing/2014/main" id="{3DAEBC4B-2775-8D84-1F68-C308C4561179}"/>
+          <p:cNvPr id="43" name="Picture 42">
+            <a:extLst>
+              <a:ext uri="{FF2B5EF4-FFF2-40B4-BE49-F238E27FC236}">
+                <a16:creationId xmlns:a16="http://schemas.microsoft.com/office/drawing/2014/main" id="{E3CEA318-402C-C10E-64D8-369D48182DDC}"/>
               </a:ext>
             </a:extLst>
           </p:cNvPr>
@@ -3380,15 +3381,15 @@
               </a:ext>
             </a:extLst>
           </a:blip>
-          <a:srcRect t="11511" r="8985"/>
+          <a:srcRect t="11918" r="9190"/>
           <a:stretch>
             <a:fillRect/>
           </a:stretch>
         </p:blipFill>
         <p:spPr>
           <a:xfrm>
-            <a:off x="3569110" y="2643238"/>
-            <a:ext cx="3569110" cy="2602517"/>
+            <a:off x="0" y="2502275"/>
+            <a:ext cx="3439650" cy="2502275"/>
           </a:xfrm>
           <a:prstGeom prst="rect">
             <a:avLst/>
@@ -3397,10 +3398,10 @@
       </p:pic>
       <p:pic>
         <p:nvPicPr>
-          <p:cNvPr id="37" name="Picture 36">
-            <a:extLst>
-              <a:ext uri="{FF2B5EF4-FFF2-40B4-BE49-F238E27FC236}">
-                <a16:creationId xmlns:a16="http://schemas.microsoft.com/office/drawing/2014/main" id="{BF83D767-770A-0E77-F5C6-AC039A599372}"/>
+          <p:cNvPr id="45" name="Picture 44">
+            <a:extLst>
+              <a:ext uri="{FF2B5EF4-FFF2-40B4-BE49-F238E27FC236}">
+                <a16:creationId xmlns:a16="http://schemas.microsoft.com/office/drawing/2014/main" id="{9C922AB5-62FF-7AB1-5A11-07C28B35583A}"/>
               </a:ext>
             </a:extLst>
           </p:cNvPr>
@@ -3417,15 +3418,15 @@
               </a:ext>
             </a:extLst>
           </a:blip>
-          <a:srcRect t="11511" r="8985"/>
+          <a:srcRect t="11918" r="9190"/>
           <a:stretch>
             <a:fillRect/>
           </a:stretch>
         </p:blipFill>
         <p:spPr>
           <a:xfrm>
-            <a:off x="3569110" y="52471"/>
-            <a:ext cx="3569110" cy="2602517"/>
+            <a:off x="3439650" y="-1"/>
+            <a:ext cx="3439650" cy="2502275"/>
           </a:xfrm>
           <a:prstGeom prst="rect">
             <a:avLst/>
@@ -3434,10 +3435,10 @@
       </p:pic>
       <p:pic>
         <p:nvPicPr>
-          <p:cNvPr id="39" name="Picture 38">
-            <a:extLst>
-              <a:ext uri="{FF2B5EF4-FFF2-40B4-BE49-F238E27FC236}">
-                <a16:creationId xmlns:a16="http://schemas.microsoft.com/office/drawing/2014/main" id="{8A5A82DE-4B78-CE62-3814-9AC5FDF98BA3}"/>
+          <p:cNvPr id="47" name="Picture 46">
+            <a:extLst>
+              <a:ext uri="{FF2B5EF4-FFF2-40B4-BE49-F238E27FC236}">
+                <a16:creationId xmlns:a16="http://schemas.microsoft.com/office/drawing/2014/main" id="{1B0A6D5F-F127-A870-5742-4FF5AD9ABBC8}"/>
               </a:ext>
             </a:extLst>
           </p:cNvPr>
@@ -3454,15 +3455,15 @@
               </a:ext>
             </a:extLst>
           </a:blip>
-          <a:srcRect t="11868" r="8985"/>
+          <a:srcRect t="11918" r="9190"/>
           <a:stretch>
             <a:fillRect/>
           </a:stretch>
         </p:blipFill>
         <p:spPr>
           <a:xfrm>
-            <a:off x="-18025" y="52471"/>
-            <a:ext cx="3569110" cy="2592015"/>
+            <a:off x="0" y="0"/>
+            <a:ext cx="3439650" cy="2502275"/>
           </a:xfrm>
           <a:prstGeom prst="rect">
             <a:avLst/>
@@ -3518,7 +3519,7 @@
         </p:nvSpPr>
         <p:spPr>
           <a:xfrm>
-            <a:off x="3551085" y="0"/>
+            <a:off x="3439650" y="0"/>
             <a:ext cx="521109" cy="338554"/>
           </a:xfrm>
           <a:prstGeom prst="rect">
@@ -3553,7 +3554,7 @@
         </p:nvSpPr>
         <p:spPr>
           <a:xfrm>
-            <a:off x="-36050" y="2585101"/>
+            <a:off x="-18025" y="2502274"/>
             <a:ext cx="521109" cy="338554"/>
           </a:xfrm>
           <a:prstGeom prst="rect">
@@ -3588,7 +3589,7 @@
         </p:nvSpPr>
         <p:spPr>
           <a:xfrm>
-            <a:off x="3551084" y="2586245"/>
+            <a:off x="3457674" y="2502274"/>
             <a:ext cx="521109" cy="338554"/>
           </a:xfrm>
           <a:prstGeom prst="rect">
@@ -3613,6 +3614,116 @@
     <p:extLst>
       <p:ext uri="{BB962C8B-B14F-4D97-AF65-F5344CB8AC3E}">
         <p14:creationId xmlns:p14="http://schemas.microsoft.com/office/powerpoint/2010/main" val="3518202370"/>
+      </p:ext>
+    </p:extLst>
+  </p:cSld>
+  <p:clrMapOvr>
+    <a:masterClrMapping/>
+  </p:clrMapOvr>
+</p:sld>
+</file>
+
+<file path=ppt/slides/slide2.xml><?xml version="1.0" encoding="utf-8"?>
+<p:sld xmlns:a="http://schemas.openxmlformats.org/drawingml/2006/main" xmlns:r="http://schemas.openxmlformats.org/officeDocument/2006/relationships" xmlns:p="http://schemas.openxmlformats.org/presentationml/2006/main">
+  <p:cSld>
+    <p:spTree>
+      <p:nvGrpSpPr>
+        <p:cNvPr id="1" name=""/>
+        <p:cNvGrpSpPr/>
+        <p:nvPr/>
+      </p:nvGrpSpPr>
+      <p:grpSpPr>
+        <a:xfrm>
+          <a:off x="0" y="0"/>
+          <a:ext cx="0" cy="0"/>
+          <a:chOff x="0" y="0"/>
+          <a:chExt cx="0" cy="0"/>
+        </a:xfrm>
+      </p:grpSpPr>
+      <p:sp>
+        <p:nvSpPr>
+          <p:cNvPr id="2" name="Title 1">
+            <a:extLst>
+              <a:ext uri="{FF2B5EF4-FFF2-40B4-BE49-F238E27FC236}">
+                <a16:creationId xmlns:a16="http://schemas.microsoft.com/office/drawing/2014/main" id="{A61AEB8C-90CC-9946-435C-59E9A6D20904}"/>
+              </a:ext>
+            </a:extLst>
+          </p:cNvPr>
+          <p:cNvSpPr>
+            <a:spLocks noGrp="1"/>
+          </p:cNvSpPr>
+          <p:nvPr>
+            <p:ph type="title"/>
+          </p:nvPr>
+        </p:nvSpPr>
+        <p:spPr/>
+        <p:txBody>
+          <a:bodyPr/>
+          <a:lstStyle/>
+          <a:p>
+            <a:endParaRPr lang="en-US"/>
+          </a:p>
+        </p:txBody>
+      </p:sp>
+      <p:sp>
+        <p:nvSpPr>
+          <p:cNvPr id="3" name="Content Placeholder 2">
+            <a:extLst>
+              <a:ext uri="{FF2B5EF4-FFF2-40B4-BE49-F238E27FC236}">
+                <a16:creationId xmlns:a16="http://schemas.microsoft.com/office/drawing/2014/main" id="{8F6D7C84-F465-E381-C780-9CC945888684}"/>
+              </a:ext>
+            </a:extLst>
+          </p:cNvPr>
+          <p:cNvSpPr>
+            <a:spLocks noGrp="1"/>
+          </p:cNvSpPr>
+          <p:nvPr>
+            <p:ph idx="1"/>
+          </p:nvPr>
+        </p:nvSpPr>
+        <p:spPr/>
+        <p:txBody>
+          <a:bodyPr/>
+          <a:lstStyle/>
+          <a:p>
+            <a:endParaRPr lang="en-US"/>
+          </a:p>
+        </p:txBody>
+      </p:sp>
+      <p:pic>
+        <p:nvPicPr>
+          <p:cNvPr id="5" name="Picture 4">
+            <a:extLst>
+              <a:ext uri="{FF2B5EF4-FFF2-40B4-BE49-F238E27FC236}">
+                <a16:creationId xmlns:a16="http://schemas.microsoft.com/office/drawing/2014/main" id="{A542A7A5-5357-FFA6-D177-9F85776D97FE}"/>
+              </a:ext>
+            </a:extLst>
+          </p:cNvPr>
+          <p:cNvPicPr>
+            <a:picLocks noChangeAspect="1"/>
+          </p:cNvPicPr>
+          <p:nvPr/>
+        </p:nvPicPr>
+        <p:blipFill>
+          <a:blip r:embed="rId2"/>
+          <a:stretch>
+            <a:fillRect/>
+          </a:stretch>
+        </p:blipFill>
+        <p:spPr>
+          <a:xfrm>
+            <a:off x="2499810" y="552048"/>
+            <a:ext cx="7192379" cy="5753903"/>
+          </a:xfrm>
+          <a:prstGeom prst="rect">
+            <a:avLst/>
+          </a:prstGeom>
+        </p:spPr>
+      </p:pic>
+    </p:spTree>
+    <p:extLst>
+      <p:ext uri="{BB962C8B-B14F-4D97-AF65-F5344CB8AC3E}">
+        <p14:creationId xmlns:p14="http://schemas.microsoft.com/office/powerpoint/2010/main" val="977402270"/>
       </p:ext>
     </p:extLst>
   </p:cSld>

--- a/data/qa_dataset/results/figures.pptx
+++ b/data/qa_dataset/results/figures.pptx
@@ -7,6 +7,7 @@
   <p:sldIdLst>
     <p:sldId id="256" r:id="rId2"/>
     <p:sldId id="257" r:id="rId3"/>
+    <p:sldId id="258" r:id="rId4"/>
   </p:sldIdLst>
   <p:sldSz cx="12192000" cy="6858000"/>
   <p:notesSz cx="6858000" cy="9144000"/>
@@ -105,6 +106,11 @@
       </a:defRPr>
     </a:lvl9pPr>
   </p:defaultTextStyle>
+  <p:extLst>
+    <p:ext uri="{EFAFB233-063F-42B5-8137-9DF3F51BA10A}">
+      <p15:sldGuideLst xmlns:p15="http://schemas.microsoft.com/office/powerpoint/2012/main"/>
+    </p:ext>
+  </p:extLst>
 </p:presentation>
 </file>
 
@@ -255,7 +261,7 @@
           <a:p>
             <a:fld id="{2B5FFEE4-28F2-4342-B789-E0E12F548551}" type="datetimeFigureOut">
               <a:rPr lang="en-US" smtClean="0"/>
-              <a:t>4/1/2026</a:t>
+              <a:t>4/6/2026</a:t>
             </a:fld>
             <a:endParaRPr lang="en-US"/>
           </a:p>
@@ -453,7 +459,7 @@
           <a:p>
             <a:fld id="{2B5FFEE4-28F2-4342-B789-E0E12F548551}" type="datetimeFigureOut">
               <a:rPr lang="en-US" smtClean="0"/>
-              <a:t>4/1/2026</a:t>
+              <a:t>4/6/2026</a:t>
             </a:fld>
             <a:endParaRPr lang="en-US"/>
           </a:p>
@@ -661,7 +667,7 @@
           <a:p>
             <a:fld id="{2B5FFEE4-28F2-4342-B789-E0E12F548551}" type="datetimeFigureOut">
               <a:rPr lang="en-US" smtClean="0"/>
-              <a:t>4/1/2026</a:t>
+              <a:t>4/6/2026</a:t>
             </a:fld>
             <a:endParaRPr lang="en-US"/>
           </a:p>
@@ -859,7 +865,7 @@
           <a:p>
             <a:fld id="{2B5FFEE4-28F2-4342-B789-E0E12F548551}" type="datetimeFigureOut">
               <a:rPr lang="en-US" smtClean="0"/>
-              <a:t>4/1/2026</a:t>
+              <a:t>4/6/2026</a:t>
             </a:fld>
             <a:endParaRPr lang="en-US"/>
           </a:p>
@@ -1134,7 +1140,7 @@
           <a:p>
             <a:fld id="{2B5FFEE4-28F2-4342-B789-E0E12F548551}" type="datetimeFigureOut">
               <a:rPr lang="en-US" smtClean="0"/>
-              <a:t>4/1/2026</a:t>
+              <a:t>4/6/2026</a:t>
             </a:fld>
             <a:endParaRPr lang="en-US"/>
           </a:p>
@@ -1399,7 +1405,7 @@
           <a:p>
             <a:fld id="{2B5FFEE4-28F2-4342-B789-E0E12F548551}" type="datetimeFigureOut">
               <a:rPr lang="en-US" smtClean="0"/>
-              <a:t>4/1/2026</a:t>
+              <a:t>4/6/2026</a:t>
             </a:fld>
             <a:endParaRPr lang="en-US"/>
           </a:p>
@@ -1811,7 +1817,7 @@
           <a:p>
             <a:fld id="{2B5FFEE4-28F2-4342-B789-E0E12F548551}" type="datetimeFigureOut">
               <a:rPr lang="en-US" smtClean="0"/>
-              <a:t>4/1/2026</a:t>
+              <a:t>4/6/2026</a:t>
             </a:fld>
             <a:endParaRPr lang="en-US"/>
           </a:p>
@@ -1952,7 +1958,7 @@
           <a:p>
             <a:fld id="{2B5FFEE4-28F2-4342-B789-E0E12F548551}" type="datetimeFigureOut">
               <a:rPr lang="en-US" smtClean="0"/>
-              <a:t>4/1/2026</a:t>
+              <a:t>4/6/2026</a:t>
             </a:fld>
             <a:endParaRPr lang="en-US"/>
           </a:p>
@@ -2065,7 +2071,7 @@
           <a:p>
             <a:fld id="{2B5FFEE4-28F2-4342-B789-E0E12F548551}" type="datetimeFigureOut">
               <a:rPr lang="en-US" smtClean="0"/>
-              <a:t>4/1/2026</a:t>
+              <a:t>4/6/2026</a:t>
             </a:fld>
             <a:endParaRPr lang="en-US"/>
           </a:p>
@@ -2376,7 +2382,7 @@
           <a:p>
             <a:fld id="{2B5FFEE4-28F2-4342-B789-E0E12F548551}" type="datetimeFigureOut">
               <a:rPr lang="en-US" smtClean="0"/>
-              <a:t>4/1/2026</a:t>
+              <a:t>4/6/2026</a:t>
             </a:fld>
             <a:endParaRPr lang="en-US"/>
           </a:p>
@@ -2664,7 +2670,7 @@
           <a:p>
             <a:fld id="{2B5FFEE4-28F2-4342-B789-E0E12F548551}" type="datetimeFigureOut">
               <a:rPr lang="en-US" smtClean="0"/>
-              <a:t>4/1/2026</a:t>
+              <a:t>4/6/2026</a:t>
             </a:fld>
             <a:endParaRPr lang="en-US"/>
           </a:p>
@@ -2905,7 +2911,7 @@
           <a:p>
             <a:fld id="{2B5FFEE4-28F2-4342-B789-E0E12F548551}" type="datetimeFigureOut">
               <a:rPr lang="en-US" smtClean="0"/>
-              <a:t>4/1/2026</a:t>
+              <a:t>4/6/2026</a:t>
             </a:fld>
             <a:endParaRPr lang="en-US"/>
           </a:p>
@@ -3733,6 +3739,148 @@
 </p:sld>
 </file>
 
+<file path=ppt/slides/slide3.xml><?xml version="1.0" encoding="utf-8"?>
+<p:sld xmlns:a="http://schemas.openxmlformats.org/drawingml/2006/main" xmlns:r="http://schemas.openxmlformats.org/officeDocument/2006/relationships" xmlns:p="http://schemas.openxmlformats.org/presentationml/2006/main">
+  <p:cSld>
+    <p:spTree>
+      <p:nvGrpSpPr>
+        <p:cNvPr id="1" name=""/>
+        <p:cNvGrpSpPr/>
+        <p:nvPr/>
+      </p:nvGrpSpPr>
+      <p:grpSpPr>
+        <a:xfrm>
+          <a:off x="0" y="0"/>
+          <a:ext cx="0" cy="0"/>
+          <a:chOff x="0" y="0"/>
+          <a:chExt cx="0" cy="0"/>
+        </a:xfrm>
+      </p:grpSpPr>
+      <p:pic>
+        <p:nvPicPr>
+          <p:cNvPr id="5" name="Content Placeholder 4">
+            <a:extLst>
+              <a:ext uri="{FF2B5EF4-FFF2-40B4-BE49-F238E27FC236}">
+                <a16:creationId xmlns:a16="http://schemas.microsoft.com/office/drawing/2014/main" id="{48091028-459C-3F58-39FF-D40E5E51BE41}"/>
+              </a:ext>
+            </a:extLst>
+          </p:cNvPr>
+          <p:cNvPicPr>
+            <a:picLocks noGrp="1" noChangeAspect="1"/>
+          </p:cNvPicPr>
+          <p:nvPr>
+            <p:ph idx="1"/>
+          </p:nvPr>
+        </p:nvPicPr>
+        <p:blipFill>
+          <a:blip r:embed="rId2">
+            <a:extLst>
+              <a:ext uri="{28A0092B-C50C-407E-A947-70E740481C1C}">
+                <a14:useLocalDpi xmlns:a14="http://schemas.microsoft.com/office/drawing/2010/main" val="0"/>
+              </a:ext>
+            </a:extLst>
+          </a:blip>
+          <a:stretch>
+            <a:fillRect/>
+          </a:stretch>
+        </p:blipFill>
+        <p:spPr>
+          <a:xfrm>
+            <a:off x="3464207" y="71762"/>
+            <a:ext cx="5263585" cy="4351338"/>
+          </a:xfrm>
+          <a:prstGeom prst="rect">
+            <a:avLst/>
+          </a:prstGeom>
+        </p:spPr>
+      </p:pic>
+      <p:pic>
+        <p:nvPicPr>
+          <p:cNvPr id="7" name="Content Placeholder 4">
+            <a:extLst>
+              <a:ext uri="{FF2B5EF4-FFF2-40B4-BE49-F238E27FC236}">
+                <a16:creationId xmlns:a16="http://schemas.microsoft.com/office/drawing/2014/main" id="{9E30821A-F09E-E0EB-1406-3EA2D57DA04F}"/>
+              </a:ext>
+            </a:extLst>
+          </p:cNvPr>
+          <p:cNvPicPr>
+            <a:picLocks noChangeAspect="1"/>
+          </p:cNvPicPr>
+          <p:nvPr/>
+        </p:nvPicPr>
+        <p:blipFill>
+          <a:blip r:embed="rId2">
+            <a:extLst>
+              <a:ext uri="{28A0092B-C50C-407E-A947-70E740481C1C}">
+                <a14:useLocalDpi xmlns:a14="http://schemas.microsoft.com/office/drawing/2010/main" val="0"/>
+              </a:ext>
+            </a:extLst>
+          </a:blip>
+          <a:srcRect l="49296" t="3239" r="34897" b="93225"/>
+          <a:stretch>
+            <a:fillRect/>
+          </a:stretch>
+        </p:blipFill>
+        <p:spPr>
+          <a:xfrm>
+            <a:off x="5848866" y="546358"/>
+            <a:ext cx="2817339" cy="475134"/>
+          </a:xfrm>
+          <a:prstGeom prst="rect">
+            <a:avLst/>
+          </a:prstGeom>
+        </p:spPr>
+      </p:pic>
+      <p:pic>
+        <p:nvPicPr>
+          <p:cNvPr id="6" name="Content Placeholder 4">
+            <a:extLst>
+              <a:ext uri="{FF2B5EF4-FFF2-40B4-BE49-F238E27FC236}">
+                <a16:creationId xmlns:a16="http://schemas.microsoft.com/office/drawing/2014/main" id="{7D62DA26-C7F2-C654-F924-D13FD7F30983}"/>
+              </a:ext>
+            </a:extLst>
+          </p:cNvPr>
+          <p:cNvPicPr>
+            <a:picLocks noChangeAspect="1"/>
+          </p:cNvPicPr>
+          <p:nvPr/>
+        </p:nvPicPr>
+        <p:blipFill>
+          <a:blip r:embed="rId2">
+            <a:extLst>
+              <a:ext uri="{28A0092B-C50C-407E-A947-70E740481C1C}">
+                <a14:useLocalDpi xmlns:a14="http://schemas.microsoft.com/office/drawing/2010/main" val="0"/>
+              </a:ext>
+            </a:extLst>
+          </a:blip>
+          <a:srcRect l="45383" t="10751" r="1092" b="78269"/>
+          <a:stretch>
+            <a:fillRect/>
+          </a:stretch>
+        </p:blipFill>
+        <p:spPr>
+          <a:xfrm>
+            <a:off x="5941246" y="365125"/>
+            <a:ext cx="2817340" cy="477795"/>
+          </a:xfrm>
+          <a:prstGeom prst="rect">
+            <a:avLst/>
+          </a:prstGeom>
+        </p:spPr>
+      </p:pic>
+    </p:spTree>
+    <p:extLst>
+      <p:ext uri="{BB962C8B-B14F-4D97-AF65-F5344CB8AC3E}">
+        <p14:creationId xmlns:p14="http://schemas.microsoft.com/office/powerpoint/2010/main" val="2545029162"/>
+      </p:ext>
+    </p:extLst>
+  </p:cSld>
+  <p:clrMapOvr>
+    <a:masterClrMapping/>
+  </p:clrMapOvr>
+</p:sld>
+</file>
+
 <file path=ppt/theme/theme1.xml><?xml version="1.0" encoding="utf-8"?>
 <a:theme xmlns:a="http://schemas.openxmlformats.org/drawingml/2006/main" name="Office Theme">
   <a:themeElements>

--- a/data/qa_dataset/results/figures.pptx
+++ b/data/qa_dataset/results/figures.pptx
@@ -8,6 +8,7 @@
     <p:sldId id="256" r:id="rId2"/>
     <p:sldId id="257" r:id="rId3"/>
     <p:sldId id="258" r:id="rId4"/>
+    <p:sldId id="259" r:id="rId5"/>
   </p:sldIdLst>
   <p:sldSz cx="12192000" cy="6858000"/>
   <p:notesSz cx="6858000" cy="9144000"/>
@@ -3758,10 +3759,10 @@
       </p:grpSpPr>
       <p:pic>
         <p:nvPicPr>
-          <p:cNvPr id="5" name="Content Placeholder 4">
-            <a:extLst>
-              <a:ext uri="{FF2B5EF4-FFF2-40B4-BE49-F238E27FC236}">
-                <a16:creationId xmlns:a16="http://schemas.microsoft.com/office/drawing/2014/main" id="{48091028-459C-3F58-39FF-D40E5E51BE41}"/>
+          <p:cNvPr id="8" name="Content Placeholder 7">
+            <a:extLst>
+              <a:ext uri="{FF2B5EF4-FFF2-40B4-BE49-F238E27FC236}">
+                <a16:creationId xmlns:a16="http://schemas.microsoft.com/office/drawing/2014/main" id="{473462FB-3DC3-D621-EBA5-935D6EA60BC0}"/>
               </a:ext>
             </a:extLst>
           </p:cNvPr>
@@ -3786,82 +3787,8 @@
         </p:blipFill>
         <p:spPr>
           <a:xfrm>
-            <a:off x="3464207" y="71762"/>
-            <a:ext cx="5263585" cy="4351338"/>
-          </a:xfrm>
-          <a:prstGeom prst="rect">
-            <a:avLst/>
-          </a:prstGeom>
-        </p:spPr>
-      </p:pic>
-      <p:pic>
-        <p:nvPicPr>
-          <p:cNvPr id="7" name="Content Placeholder 4">
-            <a:extLst>
-              <a:ext uri="{FF2B5EF4-FFF2-40B4-BE49-F238E27FC236}">
-                <a16:creationId xmlns:a16="http://schemas.microsoft.com/office/drawing/2014/main" id="{9E30821A-F09E-E0EB-1406-3EA2D57DA04F}"/>
-              </a:ext>
-            </a:extLst>
-          </p:cNvPr>
-          <p:cNvPicPr>
-            <a:picLocks noChangeAspect="1"/>
-          </p:cNvPicPr>
-          <p:nvPr/>
-        </p:nvPicPr>
-        <p:blipFill>
-          <a:blip r:embed="rId2">
-            <a:extLst>
-              <a:ext uri="{28A0092B-C50C-407E-A947-70E740481C1C}">
-                <a14:useLocalDpi xmlns:a14="http://schemas.microsoft.com/office/drawing/2010/main" val="0"/>
-              </a:ext>
-            </a:extLst>
-          </a:blip>
-          <a:srcRect l="49296" t="3239" r="34897" b="93225"/>
-          <a:stretch>
-            <a:fillRect/>
-          </a:stretch>
-        </p:blipFill>
-        <p:spPr>
-          <a:xfrm>
-            <a:off x="5848866" y="546358"/>
-            <a:ext cx="2817339" cy="475134"/>
-          </a:xfrm>
-          <a:prstGeom prst="rect">
-            <a:avLst/>
-          </a:prstGeom>
-        </p:spPr>
-      </p:pic>
-      <p:pic>
-        <p:nvPicPr>
-          <p:cNvPr id="6" name="Content Placeholder 4">
-            <a:extLst>
-              <a:ext uri="{FF2B5EF4-FFF2-40B4-BE49-F238E27FC236}">
-                <a16:creationId xmlns:a16="http://schemas.microsoft.com/office/drawing/2014/main" id="{7D62DA26-C7F2-C654-F924-D13FD7F30983}"/>
-              </a:ext>
-            </a:extLst>
-          </p:cNvPr>
-          <p:cNvPicPr>
-            <a:picLocks noChangeAspect="1"/>
-          </p:cNvPicPr>
-          <p:nvPr/>
-        </p:nvPicPr>
-        <p:blipFill>
-          <a:blip r:embed="rId2">
-            <a:extLst>
-              <a:ext uri="{28A0092B-C50C-407E-A947-70E740481C1C}">
-                <a14:useLocalDpi xmlns:a14="http://schemas.microsoft.com/office/drawing/2010/main" val="0"/>
-              </a:ext>
-            </a:extLst>
-          </a:blip>
-          <a:srcRect l="45383" t="10751" r="1092" b="78269"/>
-          <a:stretch>
-            <a:fillRect/>
-          </a:stretch>
-        </p:blipFill>
-        <p:spPr>
-          <a:xfrm>
-            <a:off x="5941246" y="365125"/>
-            <a:ext cx="2817340" cy="477795"/>
+            <a:off x="3288620" y="1825625"/>
+            <a:ext cx="5614759" cy="4351338"/>
           </a:xfrm>
           <a:prstGeom prst="rect">
             <a:avLst/>
@@ -3872,6 +3799,99 @@
     <p:extLst>
       <p:ext uri="{BB962C8B-B14F-4D97-AF65-F5344CB8AC3E}">
         <p14:creationId xmlns:p14="http://schemas.microsoft.com/office/powerpoint/2010/main" val="2545029162"/>
+      </p:ext>
+    </p:extLst>
+  </p:cSld>
+  <p:clrMapOvr>
+    <a:masterClrMapping/>
+  </p:clrMapOvr>
+</p:sld>
+</file>
+
+<file path=ppt/slides/slide4.xml><?xml version="1.0" encoding="utf-8"?>
+<p:sld xmlns:a="http://schemas.openxmlformats.org/drawingml/2006/main" xmlns:r="http://schemas.openxmlformats.org/officeDocument/2006/relationships" xmlns:p="http://schemas.openxmlformats.org/presentationml/2006/main">
+  <p:cSld>
+    <p:spTree>
+      <p:nvGrpSpPr>
+        <p:cNvPr id="1" name=""/>
+        <p:cNvGrpSpPr/>
+        <p:nvPr/>
+      </p:nvGrpSpPr>
+      <p:grpSpPr>
+        <a:xfrm>
+          <a:off x="0" y="0"/>
+          <a:ext cx="0" cy="0"/>
+          <a:chOff x="0" y="0"/>
+          <a:chExt cx="0" cy="0"/>
+        </a:xfrm>
+      </p:grpSpPr>
+      <p:sp>
+        <p:nvSpPr>
+          <p:cNvPr id="2" name="Title 1">
+            <a:extLst>
+              <a:ext uri="{FF2B5EF4-FFF2-40B4-BE49-F238E27FC236}">
+                <a16:creationId xmlns:a16="http://schemas.microsoft.com/office/drawing/2014/main" id="{B55E0ACC-E09B-ECED-63BA-73F5794A0FC8}"/>
+              </a:ext>
+            </a:extLst>
+          </p:cNvPr>
+          <p:cNvSpPr>
+            <a:spLocks noGrp="1"/>
+          </p:cNvSpPr>
+          <p:nvPr>
+            <p:ph type="title"/>
+          </p:nvPr>
+        </p:nvSpPr>
+        <p:spPr/>
+        <p:txBody>
+          <a:bodyPr/>
+          <a:lstStyle/>
+          <a:p>
+            <a:endParaRPr lang="en-US"/>
+          </a:p>
+        </p:txBody>
+      </p:sp>
+      <p:pic>
+        <p:nvPicPr>
+          <p:cNvPr id="5" name="Content Placeholder 4">
+            <a:extLst>
+              <a:ext uri="{FF2B5EF4-FFF2-40B4-BE49-F238E27FC236}">
+                <a16:creationId xmlns:a16="http://schemas.microsoft.com/office/drawing/2014/main" id="{10FFFFAE-C4D0-D248-8692-FECC5F15CF53}"/>
+              </a:ext>
+            </a:extLst>
+          </p:cNvPr>
+          <p:cNvPicPr>
+            <a:picLocks noGrp="1" noChangeAspect="1"/>
+          </p:cNvPicPr>
+          <p:nvPr>
+            <p:ph idx="1"/>
+          </p:nvPr>
+        </p:nvPicPr>
+        <p:blipFill>
+          <a:blip r:embed="rId2">
+            <a:extLst>
+              <a:ext uri="{28A0092B-C50C-407E-A947-70E740481C1C}">
+                <a14:useLocalDpi xmlns:a14="http://schemas.microsoft.com/office/drawing/2010/main" val="0"/>
+              </a:ext>
+            </a:extLst>
+          </a:blip>
+          <a:stretch>
+            <a:fillRect/>
+          </a:stretch>
+        </p:blipFill>
+        <p:spPr>
+          <a:xfrm>
+            <a:off x="2249979" y="1825625"/>
+            <a:ext cx="7692042" cy="4351338"/>
+          </a:xfrm>
+          <a:prstGeom prst="rect">
+            <a:avLst/>
+          </a:prstGeom>
+        </p:spPr>
+      </p:pic>
+    </p:spTree>
+    <p:extLst>
+      <p:ext uri="{BB962C8B-B14F-4D97-AF65-F5344CB8AC3E}">
+        <p14:creationId xmlns:p14="http://schemas.microsoft.com/office/powerpoint/2010/main" val="2437043599"/>
       </p:ext>
     </p:extLst>
   </p:cSld>
